--- a/out/merged/MAIN_AEGIS_updated.pptx
+++ b/out/merged/MAIN_AEGIS_updated.pptx
@@ -1863,7 +1863,7 @@
           <a:p>
             <a:r>
               <a:rPr lang="en-US" dirty="0"/>
-              <a:t>The short version: it found real flaws in a real Stewart repository, and where it could not be certain it said so rather than guessing. Q: Why "can't prove" and not yes or no? — AEGIS has a hand-curated list of about nine packages where the exact dangerous function is documented. Angular is not on it yet, so the tool can confirm the app uses the package but not whether the vulnerable function specifically is called. That is a known limitation, not a bug, and it is why those two need a person. Earlier, testing against an open-source project, I also found and fixed two bugs in my own code — one where a "can't prove" result was being described as a confirmed absence.</a:t>
+              <a:t>Land the last line: 28 findings became one upgrade. Q: You said two could not be ruled out — so the tool failed on those? — No, and it costs nothing here. AEGIS has a hand-curated list of about nine packages where the exact dangerous function is documented; Angular is not on it yet, so it can confirm the app uses the package but not that the vulnerable function specifically is called. It said so instead of calling them safe. All three findings are the same Angular version bump, so the decision is identical either way. Q: Would you ship that upgrade? — Yes: it is in-range, non-breaking, and the repo's test suite runs, so it can be proven before it merges. Q: Was anything confirmed reachable? — No. Nothing was confirmed reachable and nothing was confirmed reaching production. Q: How do you know the 25 are really clear? — Read with a real code parser, not a text search, so it is a structural answer rather than string matching. Earlier, testing against an open-source project, I also found and fixed two bugs in my own code — one where a "can't prove" result was being described as a confirmed absence.</a:t>
             </a:r>
             <a:endParaRPr lang="en-US" dirty="0"/>
           </a:p>
@@ -7100,7 +7100,7 @@
                 <a:ea typeface="Montserrat ExtraBold" pitchFamily="34" charset="-122"/>
                 <a:cs typeface="Montserrat ExtraBold" pitchFamily="34" charset="-120"/>
               </a:rPr>
-              <a:t>1,518 packages, 28 real flaws, nothing guessed</a:t>
+              <a:t>28 flagged. 25 need nothing. 3 are one upgrade.</a:t>
             </a:r>
             <a:endParaRPr lang="en-US" sz="2900" dirty="0"/>
           </a:p>
@@ -7257,7 +7257,7 @@
                 <a:ea typeface="Montserrat Medium" pitchFamily="34" charset="-122"/>
                 <a:cs typeface="Montserrat Medium" pitchFamily="34" charset="-120"/>
               </a:rPr>
-              <a:t>Not a test project — the </a:t>
+              <a:t>A read-only scan of the </a:t>
             </a:r>
             <a:pPr indent="0" marL="0">
               <a:buNone/>
@@ -7285,7 +7285,7 @@
                 <a:ea typeface="Montserrat Medium" pitchFamily="34" charset="-122"/>
                 <a:cs typeface="Montserrat Medium" pitchFamily="34" charset="-120"/>
               </a:rPr>
-              <a:t> repository. Every flaw is genuine, pulled live.</a:t>
+              <a:t> repository. Real code, real flaws, pulled live.</a:t>
             </a:r>
             <a:endParaRPr lang="en-US" sz="1400" dirty="0"/>
           </a:p>
@@ -7299,12 +7299,12 @@
         </p:nvSpPr>
         <p:spPr>
           <a:xfrm>
-            <a:off x="777240" y="2432304"/>
-            <a:ext cx="3310128" cy="1207008"/>
+            <a:off x="777240" y="2377440"/>
+            <a:ext cx="3310128" cy="1060704"/>
           </a:xfrm>
           <a:prstGeom prst="roundRect">
             <a:avLst>
-              <a:gd name="adj" fmla="val 4545"/>
+              <a:gd name="adj" fmla="val 5172"/>
             </a:avLst>
           </a:prstGeom>
           <a:solidFill>
@@ -7333,8 +7333,8 @@
         </p:nvSpPr>
         <p:spPr>
           <a:xfrm>
-            <a:off x="960120" y="2633472"/>
-            <a:ext cx="2944368" cy="566928"/>
+            <a:off x="960120" y="2523744"/>
+            <a:ext cx="2944368" cy="530352"/>
           </a:xfrm>
           <a:prstGeom prst="rect">
             <a:avLst/>
@@ -7350,7 +7350,7 @@
               <a:buNone/>
             </a:pPr>
             <a:r>
-              <a:rPr lang="en-US" sz="3800" spc="-140" kern="0" dirty="0">
+              <a:rPr lang="en-US" sz="3400" spc="-120" kern="0" dirty="0">
                 <a:solidFill>
                   <a:srgbClr val="2B2D30"/>
                 </a:solidFill>
@@ -7360,7 +7360,7 @@
               </a:rPr>
               <a:t>1,518</a:t>
             </a:r>
-            <a:endParaRPr lang="en-US" sz="3800" dirty="0"/>
+            <a:endParaRPr lang="en-US" sz="3400" dirty="0"/>
           </a:p>
         </p:txBody>
       </p:sp>
@@ -7372,8 +7372,8 @@
         </p:nvSpPr>
         <p:spPr>
           <a:xfrm>
-            <a:off x="960120" y="3255264"/>
-            <a:ext cx="2944368" cy="274320"/>
+            <a:off x="960120" y="3090672"/>
+            <a:ext cx="2944368" cy="256032"/>
           </a:xfrm>
           <a:prstGeom prst="rect">
             <a:avLst/>
@@ -7411,7 +7411,7 @@
         </p:nvSpPr>
         <p:spPr>
           <a:xfrm>
-            <a:off x="4081196" y="2816352"/>
+            <a:off x="4081196" y="2706624"/>
             <a:ext cx="365760" cy="420624"/>
           </a:xfrm>
           <a:prstGeom prst="rect">
@@ -7450,12 +7450,12 @@
         </p:nvSpPr>
         <p:spPr>
           <a:xfrm>
-            <a:off x="4440784" y="2432304"/>
-            <a:ext cx="3310128" cy="1207008"/>
+            <a:off x="4440784" y="2377440"/>
+            <a:ext cx="3310128" cy="1060704"/>
           </a:xfrm>
           <a:prstGeom prst="roundRect">
             <a:avLst>
-              <a:gd name="adj" fmla="val 4545"/>
+              <a:gd name="adj" fmla="val 5172"/>
             </a:avLst>
           </a:prstGeom>
           <a:solidFill>
@@ -7484,8 +7484,8 @@
         </p:nvSpPr>
         <p:spPr>
           <a:xfrm>
-            <a:off x="4623664" y="2633472"/>
-            <a:ext cx="2944368" cy="566928"/>
+            <a:off x="4623664" y="2523744"/>
+            <a:ext cx="2944368" cy="530352"/>
           </a:xfrm>
           <a:prstGeom prst="rect">
             <a:avLst/>
@@ -7501,7 +7501,7 @@
               <a:buNone/>
             </a:pPr>
             <a:r>
-              <a:rPr lang="en-US" sz="3800" spc="-140" kern="0" dirty="0">
+              <a:rPr lang="en-US" sz="3400" spc="-120" kern="0" dirty="0">
                 <a:solidFill>
                   <a:srgbClr val="2B2D30"/>
                 </a:solidFill>
@@ -7511,7 +7511,7 @@
               </a:rPr>
               <a:t>28</a:t>
             </a:r>
-            <a:endParaRPr lang="en-US" sz="3800" dirty="0"/>
+            <a:endParaRPr lang="en-US" sz="3400" dirty="0"/>
           </a:p>
         </p:txBody>
       </p:sp>
@@ -7523,8 +7523,8 @@
         </p:nvSpPr>
         <p:spPr>
           <a:xfrm>
-            <a:off x="4623664" y="3255264"/>
-            <a:ext cx="2944368" cy="274320"/>
+            <a:off x="4623664" y="3090672"/>
+            <a:ext cx="2944368" cy="256032"/>
           </a:xfrm>
           <a:prstGeom prst="rect">
             <a:avLst/>
@@ -7562,7 +7562,7 @@
         </p:nvSpPr>
         <p:spPr>
           <a:xfrm>
-            <a:off x="7744739" y="2816352"/>
+            <a:off x="7744739" y="2706624"/>
             <a:ext cx="365760" cy="420624"/>
           </a:xfrm>
           <a:prstGeom prst="rect">
@@ -7601,12 +7601,12 @@
         </p:nvSpPr>
         <p:spPr>
           <a:xfrm>
-            <a:off x="8104327" y="2432304"/>
-            <a:ext cx="3310128" cy="1207008"/>
+            <a:off x="8104327" y="2377440"/>
+            <a:ext cx="3310128" cy="1060704"/>
           </a:xfrm>
           <a:prstGeom prst="roundRect">
             <a:avLst>
-              <a:gd name="adj" fmla="val 4545"/>
+              <a:gd name="adj" fmla="val 5172"/>
             </a:avLst>
           </a:prstGeom>
           <a:solidFill>
@@ -7635,8 +7635,8 @@
         </p:nvSpPr>
         <p:spPr>
           <a:xfrm>
-            <a:off x="8287207" y="2633472"/>
-            <a:ext cx="2944368" cy="566928"/>
+            <a:off x="8287207" y="2523744"/>
+            <a:ext cx="2944368" cy="530352"/>
           </a:xfrm>
           <a:prstGeom prst="rect">
             <a:avLst/>
@@ -7652,7 +7652,7 @@
               <a:buNone/>
             </a:pPr>
             <a:r>
-              <a:rPr lang="en-US" sz="3800" spc="-140" kern="0" dirty="0">
+              <a:rPr lang="en-US" sz="3400" spc="-120" kern="0" dirty="0">
                 <a:solidFill>
                   <a:srgbClr val="942838"/>
                 </a:solidFill>
@@ -7662,7 +7662,7 @@
               </a:rPr>
               <a:t>3</a:t>
             </a:r>
-            <a:endParaRPr lang="en-US" sz="3800" dirty="0"/>
+            <a:endParaRPr lang="en-US" sz="3400" dirty="0"/>
           </a:p>
         </p:txBody>
       </p:sp>
@@ -7674,8 +7674,8 @@
         </p:nvSpPr>
         <p:spPr>
           <a:xfrm>
-            <a:off x="8287207" y="3255264"/>
-            <a:ext cx="2944368" cy="274320"/>
+            <a:off x="8287207" y="3090672"/>
+            <a:ext cx="2944368" cy="256032"/>
           </a:xfrm>
           <a:prstGeom prst="rect">
             <a:avLst/>
@@ -7699,7 +7699,7 @@
                 <a:ea typeface="Montserrat Medium" pitchFamily="34" charset="-122"/>
                 <a:cs typeface="Montserrat Medium" pitchFamily="34" charset="-120"/>
               </a:rPr>
-              <a:t>needing a human decision</a:t>
+              <a:t>left needing a decision</a:t>
             </a:r>
             <a:endParaRPr lang="en-US" sz="950" dirty="0"/>
           </a:p>
@@ -7707,18 +7707,57 @@
       </p:sp>
       <p:sp>
         <p:nvSpPr>
-          <p:cNvPr id="21" name="Shape 18"/>
+          <p:cNvPr id="21" name="Text 18"/>
+          <p:cNvSpPr txBox="1"/>
+          <p:nvPr/>
+        </p:nvSpPr>
+        <p:spPr>
+          <a:xfrm>
+            <a:off x="777240" y="3675888"/>
+            <a:ext cx="5486400" cy="201168"/>
+          </a:xfrm>
+          <a:prstGeom prst="rect">
+            <a:avLst/>
+          </a:prstGeom>
+          <a:noFill/>
+          <a:ln/>
+        </p:spPr>
+        <p:txBody>
+          <a:bodyPr wrap="square" lIns="0" tIns="0" rIns="0" bIns="0" rtlCol="0" anchor="t"/>
+          <a:lstStyle/>
+          <a:p>
+            <a:pPr indent="0" marL="0">
+              <a:buNone/>
+            </a:pPr>
+            <a:r>
+              <a:rPr lang="en-US" sz="850" spc="140" kern="0" dirty="0">
+                <a:solidFill>
+                  <a:srgbClr val="6E7175"/>
+                </a:solidFill>
+                <a:latin typeface="Montserrat SemiBold" pitchFamily="34" charset="0"/>
+                <a:ea typeface="Montserrat SemiBold" pitchFamily="34" charset="-122"/>
+                <a:cs typeface="Montserrat SemiBold" pitchFamily="34" charset="-120"/>
+              </a:rPr>
+              <a:t>WHAT THAT MEANS FOR THE TEAM</a:t>
+            </a:r>
+            <a:endParaRPr lang="en-US" sz="850" dirty="0"/>
+          </a:p>
+        </p:txBody>
+      </p:sp>
+      <p:sp>
+        <p:nvSpPr>
+          <p:cNvPr id="22" name="Shape 19"/>
           <p:cNvSpPr/>
           <p:nvPr/>
         </p:nvSpPr>
         <p:spPr>
           <a:xfrm>
             <a:off x="777240" y="3931920"/>
-            <a:ext cx="5175504" cy="1371600"/>
+            <a:ext cx="3362858" cy="1298448"/>
           </a:xfrm>
           <a:prstGeom prst="roundRect">
             <a:avLst>
-              <a:gd name="adj" fmla="val 4000"/>
+              <a:gd name="adj" fmla="val 4225"/>
             </a:avLst>
           </a:prstGeom>
           <a:solidFill>
@@ -7741,14 +7780,14 @@
       </p:sp>
       <p:sp>
         <p:nvSpPr>
-          <p:cNvPr id="22" name="Shape 19"/>
+          <p:cNvPr id="23" name="Shape 20"/>
           <p:cNvSpPr/>
           <p:nvPr/>
         </p:nvSpPr>
         <p:spPr>
           <a:xfrm>
             <a:off x="777240" y="3931920"/>
-            <a:ext cx="5175504" cy="45720"/>
+            <a:ext cx="3362858" cy="45720"/>
           </a:xfrm>
           <a:prstGeom prst="rect">
             <a:avLst/>
@@ -7761,14 +7800,14 @@
       </p:sp>
       <p:sp>
         <p:nvSpPr>
-          <p:cNvPr id="23" name="Text 20"/>
-          <p:cNvSpPr txBox="1"/>
-          <p:nvPr/>
-        </p:nvSpPr>
-        <p:spPr>
-          <a:xfrm>
-            <a:off x="1069848" y="4187952"/>
-            <a:ext cx="4590288" cy="274320"/>
+          <p:cNvPr id="24" name="Text 21"/>
+          <p:cNvSpPr txBox="1"/>
+          <p:nvPr/>
+        </p:nvSpPr>
+        <p:spPr>
+          <a:xfrm>
+            <a:off x="1033272" y="4151376"/>
+            <a:ext cx="2850794" cy="256032"/>
           </a:xfrm>
           <a:prstGeom prst="rect">
             <a:avLst/>
@@ -7784,30 +7823,30 @@
               <a:buNone/>
             </a:pPr>
             <a:r>
-              <a:rPr lang="en-US" sz="1350" dirty="0">
+              <a:rPr lang="en-US" sz="1450" spc="-20" kern="0" dirty="0">
                 <a:solidFill>
                   <a:srgbClr val="2B2D30"/>
                 </a:solidFill>
-                <a:latin typeface="Montserrat SemiBold" pitchFamily="34" charset="0"/>
-                <a:ea typeface="Montserrat SemiBold" pitchFamily="34" charset="-122"/>
-                <a:cs typeface="Montserrat SemiBold" pitchFamily="34" charset="-120"/>
-              </a:rPr>
-              <a:t>25 confirmed not called by our code</a:t>
-            </a:r>
-            <a:endParaRPr lang="en-US" sz="1350" dirty="0"/>
-          </a:p>
-        </p:txBody>
-      </p:sp>
-      <p:sp>
-        <p:nvSpPr>
-          <p:cNvPr id="24" name="Text 21"/>
-          <p:cNvSpPr txBox="1"/>
-          <p:nvPr/>
-        </p:nvSpPr>
-        <p:spPr>
-          <a:xfrm>
-            <a:off x="1069848" y="4517136"/>
-            <a:ext cx="4590288" cy="676656"/>
+                <a:latin typeface="Montserrat ExtraBold" pitchFamily="34" charset="0"/>
+                <a:ea typeface="Montserrat ExtraBold" pitchFamily="34" charset="-122"/>
+                <a:cs typeface="Montserrat ExtraBold" pitchFamily="34" charset="-120"/>
+              </a:rPr>
+              <a:t>25 need nothing</a:t>
+            </a:r>
+            <a:endParaRPr lang="en-US" sz="1450" dirty="0"/>
+          </a:p>
+        </p:txBody>
+      </p:sp>
+      <p:sp>
+        <p:nvSpPr>
+          <p:cNvPr id="25" name="Text 22"/>
+          <p:cNvSpPr txBox="1"/>
+          <p:nvPr/>
+        </p:nvSpPr>
+        <p:spPr>
+          <a:xfrm>
+            <a:off x="1033272" y="4462272"/>
+            <a:ext cx="2850794" cy="731520"/>
           </a:xfrm>
           <a:prstGeom prst="rect">
             <a:avLst/>
@@ -7821,12 +7860,12 @@
           <a:p>
             <a:pPr indent="0" marL="0">
               <a:lnSpc>
-                <a:spcPct val="122000"/>
+                <a:spcPct val="120000"/>
               </a:lnSpc>
               <a:buNone/>
             </a:pPr>
             <a:r>
-              <a:rPr lang="en-US" sz="1100" dirty="0">
+              <a:rPr lang="en-US" sz="950" dirty="0">
                 <a:solidFill>
                   <a:srgbClr val="6E7175"/>
                 </a:solidFill>
@@ -7834,26 +7873,26 @@
                 <a:ea typeface="Montserrat" pitchFamily="34" charset="-122"/>
                 <a:cs typeface="Montserrat" pitchFamily="34" charset="-120"/>
               </a:rPr>
-              <a:t>Dev and build tooling, resolved with a real code parser rather than a text search — so this is a confident answer, not a guess.</a:t>
-            </a:r>
-            <a:endParaRPr lang="en-US" sz="1100" dirty="0"/>
-          </a:p>
-        </p:txBody>
-      </p:sp>
-      <p:sp>
-        <p:nvSpPr>
-          <p:cNvPr id="25" name="Shape 22"/>
+              <a:t>Build and development tooling the app never calls. AEGIS read the code to establish that, so it is an answer rather than an assumption.</a:t>
+            </a:r>
+            <a:endParaRPr lang="en-US" sz="950" dirty="0"/>
+          </a:p>
+        </p:txBody>
+      </p:sp>
+      <p:sp>
+        <p:nvSpPr>
+          <p:cNvPr id="26" name="Shape 23"/>
           <p:cNvSpPr/>
           <p:nvPr/>
         </p:nvSpPr>
         <p:spPr>
           <a:xfrm>
-            <a:off x="6236208" y="3931920"/>
-            <a:ext cx="5175504" cy="1371600"/>
+            <a:off x="4414418" y="3931920"/>
+            <a:ext cx="3362858" cy="1298448"/>
           </a:xfrm>
           <a:prstGeom prst="roundRect">
             <a:avLst>
-              <a:gd name="adj" fmla="val 4000"/>
+              <a:gd name="adj" fmla="val 4225"/>
             </a:avLst>
           </a:prstGeom>
           <a:solidFill>
@@ -7861,7 +7900,7 @@
           </a:solidFill>
           <a:ln w="9525">
             <a:solidFill>
-              <a:srgbClr val="942838"/>
+              <a:srgbClr val="E6E4E2"/>
             </a:solidFill>
             <a:prstDash val="solid"/>
           </a:ln>
@@ -7876,14 +7915,14 @@
       </p:sp>
       <p:sp>
         <p:nvSpPr>
-          <p:cNvPr id="26" name="Shape 23"/>
+          <p:cNvPr id="27" name="Shape 24"/>
           <p:cNvSpPr/>
           <p:nvPr/>
         </p:nvSpPr>
         <p:spPr>
           <a:xfrm>
-            <a:off x="6236208" y="3931920"/>
-            <a:ext cx="5175504" cy="45720"/>
+            <a:off x="4414418" y="3931920"/>
+            <a:ext cx="3362858" cy="45720"/>
           </a:xfrm>
           <a:prstGeom prst="rect">
             <a:avLst/>
@@ -7896,14 +7935,14 @@
       </p:sp>
       <p:sp>
         <p:nvSpPr>
-          <p:cNvPr id="27" name="Text 24"/>
-          <p:cNvSpPr txBox="1"/>
-          <p:nvPr/>
-        </p:nvSpPr>
-        <p:spPr>
-          <a:xfrm>
-            <a:off x="6528816" y="4187952"/>
-            <a:ext cx="4590288" cy="274320"/>
+          <p:cNvPr id="28" name="Text 25"/>
+          <p:cNvSpPr txBox="1"/>
+          <p:nvPr/>
+        </p:nvSpPr>
+        <p:spPr>
+          <a:xfrm>
+            <a:off x="4670450" y="4151376"/>
+            <a:ext cx="2850794" cy="256032"/>
           </a:xfrm>
           <a:prstGeom prst="rect">
             <a:avLst/>
@@ -7919,7 +7958,265 @@
               <a:buNone/>
             </a:pPr>
             <a:r>
-              <a:rPr lang="en-US" sz="1350" dirty="0">
+              <a:rPr lang="en-US" sz="1450" spc="-20" kern="0" dirty="0">
+                <a:solidFill>
+                  <a:srgbClr val="2B2D30"/>
+                </a:solidFill>
+                <a:latin typeface="Montserrat ExtraBold" pitchFamily="34" charset="0"/>
+                <a:ea typeface="Montserrat ExtraBold" pitchFamily="34" charset="-122"/>
+                <a:cs typeface="Montserrat ExtraBold" pitchFamily="34" charset="-120"/>
+              </a:rPr>
+              <a:t>3 are one upgrade</a:t>
+            </a:r>
+            <a:endParaRPr lang="en-US" sz="1450" dirty="0"/>
+          </a:p>
+        </p:txBody>
+      </p:sp>
+      <p:sp>
+        <p:nvSpPr>
+          <p:cNvPr id="29" name="Text 26"/>
+          <p:cNvSpPr txBox="1"/>
+          <p:nvPr/>
+        </p:nvSpPr>
+        <p:spPr>
+          <a:xfrm>
+            <a:off x="4670450" y="4462272"/>
+            <a:ext cx="2850794" cy="731520"/>
+          </a:xfrm>
+          <a:prstGeom prst="rect">
+            <a:avLst/>
+          </a:prstGeom>
+          <a:noFill/>
+          <a:ln/>
+        </p:spPr>
+        <p:txBody>
+          <a:bodyPr wrap="square" lIns="0" tIns="0" rIns="0" bIns="0" rtlCol="0" anchor="t"/>
+          <a:lstStyle/>
+          <a:p>
+            <a:pPr indent="0" marL="0">
+              <a:lnSpc>
+                <a:spcPct val="120000"/>
+              </a:lnSpc>
+              <a:buNone/>
+            </a:pPr>
+            <a:r>
+              <a:rPr lang="en-US" sz="950" dirty="0">
+                <a:solidFill>
+                  <a:srgbClr val="6E7175"/>
+                </a:solidFill>
+                <a:latin typeface="Montserrat" pitchFamily="34" charset="0"/>
+                <a:ea typeface="Montserrat" pitchFamily="34" charset="-122"/>
+                <a:cs typeface="Montserrat" pitchFamily="34" charset="-120"/>
+              </a:rPr>
+              <a:t>All three are Angular, all three sit on version 20.3.18, and all three are fixed by moving to 20.3.22. One version bump, not three pieces of work.</a:t>
+            </a:r>
+            <a:endParaRPr lang="en-US" sz="950" dirty="0"/>
+          </a:p>
+        </p:txBody>
+      </p:sp>
+      <p:sp>
+        <p:nvSpPr>
+          <p:cNvPr id="30" name="Shape 27"/>
+          <p:cNvSpPr/>
+          <p:nvPr/>
+        </p:nvSpPr>
+        <p:spPr>
+          <a:xfrm>
+            <a:off x="8051597" y="3931920"/>
+            <a:ext cx="3362858" cy="1298448"/>
+          </a:xfrm>
+          <a:prstGeom prst="roundRect">
+            <a:avLst>
+              <a:gd name="adj" fmla="val 4225"/>
+            </a:avLst>
+          </a:prstGeom>
+          <a:solidFill>
+            <a:srgbClr val="FFFFFF"/>
+          </a:solidFill>
+          <a:ln w="9525">
+            <a:solidFill>
+              <a:srgbClr val="E6E4E2"/>
+            </a:solidFill>
+            <a:prstDash val="solid"/>
+          </a:ln>
+          <a:effectLst>
+            <a:outerShdw sx="100000" sy="100000" kx="0" ky="0" algn="bl" rotWithShape="0" blurRad="3.1302311439840524e+54" dist="7.825577859960131e+53" dir="1.1754624614400003e+64">
+              <a:srgbClr val="959092">
+                <a:alpha val="2.2e+64"/>
+              </a:srgbClr>
+            </a:outerShdw>
+          </a:effectLst>
+        </p:spPr>
+      </p:sp>
+      <p:sp>
+        <p:nvSpPr>
+          <p:cNvPr id="31" name="Shape 28"/>
+          <p:cNvSpPr/>
+          <p:nvPr/>
+        </p:nvSpPr>
+        <p:spPr>
+          <a:xfrm>
+            <a:off x="8051597" y="3931920"/>
+            <a:ext cx="3362858" cy="45720"/>
+          </a:xfrm>
+          <a:prstGeom prst="rect">
+            <a:avLst/>
+          </a:prstGeom>
+          <a:solidFill>
+            <a:srgbClr val="43464A"/>
+          </a:solidFill>
+          <a:ln/>
+        </p:spPr>
+      </p:sp>
+      <p:sp>
+        <p:nvSpPr>
+          <p:cNvPr id="32" name="Text 29"/>
+          <p:cNvSpPr txBox="1"/>
+          <p:nvPr/>
+        </p:nvSpPr>
+        <p:spPr>
+          <a:xfrm>
+            <a:off x="8307629" y="4151376"/>
+            <a:ext cx="2850794" cy="256032"/>
+          </a:xfrm>
+          <a:prstGeom prst="rect">
+            <a:avLst/>
+          </a:prstGeom>
+          <a:noFill/>
+          <a:ln/>
+        </p:spPr>
+        <p:txBody>
+          <a:bodyPr wrap="square" lIns="0" tIns="0" rIns="0" bIns="0" rtlCol="0" anchor="t"/>
+          <a:lstStyle/>
+          <a:p>
+            <a:pPr indent="0" marL="0">
+              <a:buNone/>
+            </a:pPr>
+            <a:r>
+              <a:rPr lang="en-US" sz="1450" spc="-20" kern="0" dirty="0">
+                <a:solidFill>
+                  <a:srgbClr val="2B2D30"/>
+                </a:solidFill>
+                <a:latin typeface="Montserrat ExtraBold" pitchFamily="34" charset="0"/>
+                <a:ea typeface="Montserrat ExtraBold" pitchFamily="34" charset="-122"/>
+                <a:cs typeface="Montserrat ExtraBold" pitchFamily="34" charset="-120"/>
+              </a:rPr>
+              <a:t>Verified, not hoped for</a:t>
+            </a:r>
+            <a:endParaRPr lang="en-US" sz="1450" dirty="0"/>
+          </a:p>
+        </p:txBody>
+      </p:sp>
+      <p:sp>
+        <p:nvSpPr>
+          <p:cNvPr id="33" name="Text 30"/>
+          <p:cNvSpPr txBox="1"/>
+          <p:nvPr/>
+        </p:nvSpPr>
+        <p:spPr>
+          <a:xfrm>
+            <a:off x="8307629" y="4462272"/>
+            <a:ext cx="2850794" cy="731520"/>
+          </a:xfrm>
+          <a:prstGeom prst="rect">
+            <a:avLst/>
+          </a:prstGeom>
+          <a:noFill/>
+          <a:ln/>
+        </p:spPr>
+        <p:txBody>
+          <a:bodyPr wrap="square" lIns="0" tIns="0" rIns="0" bIns="0" rtlCol="0" anchor="t"/>
+          <a:lstStyle/>
+          <a:p>
+            <a:pPr indent="0" marL="0">
+              <a:lnSpc>
+                <a:spcPct val="120000"/>
+              </a:lnSpc>
+              <a:buNone/>
+            </a:pPr>
+            <a:r>
+              <a:rPr lang="en-US" sz="950" dirty="0">
+                <a:solidFill>
+                  <a:srgbClr val="6E7175"/>
+                </a:solidFill>
+                <a:latin typeface="Montserrat" pitchFamily="34" charset="0"/>
+                <a:ea typeface="Montserrat" pitchFamily="34" charset="-122"/>
+                <a:cs typeface="Montserrat" pitchFamily="34" charset="-120"/>
+              </a:rPr>
+              <a:t>The repository's own test suite runs, so the upgrade can be proven safe before it ships. Nothing on the list is a breaking change.</a:t>
+            </a:r>
+            <a:endParaRPr lang="en-US" sz="950" dirty="0"/>
+          </a:p>
+        </p:txBody>
+      </p:sp>
+      <p:sp>
+        <p:nvSpPr>
+          <p:cNvPr id="34" name="Shape 31"/>
+          <p:cNvSpPr/>
+          <p:nvPr/>
+        </p:nvSpPr>
+        <p:spPr>
+          <a:xfrm>
+            <a:off x="777240" y="5358384"/>
+            <a:ext cx="10637215" cy="786384"/>
+          </a:xfrm>
+          <a:prstGeom prst="roundRect">
+            <a:avLst>
+              <a:gd name="adj" fmla="val 6977"/>
+            </a:avLst>
+          </a:prstGeom>
+          <a:solidFill>
+            <a:srgbClr val="F6EEF0"/>
+          </a:solidFill>
+          <a:ln/>
+        </p:spPr>
+      </p:sp>
+      <p:sp>
+        <p:nvSpPr>
+          <p:cNvPr id="35" name="Shape 32"/>
+          <p:cNvSpPr/>
+          <p:nvPr/>
+        </p:nvSpPr>
+        <p:spPr>
+          <a:xfrm>
+            <a:off x="777240" y="5358384"/>
+            <a:ext cx="50292" cy="786384"/>
+          </a:xfrm>
+          <a:prstGeom prst="rect">
+            <a:avLst/>
+          </a:prstGeom>
+          <a:solidFill>
+            <a:srgbClr val="942838"/>
+          </a:solidFill>
+          <a:ln/>
+        </p:spPr>
+      </p:sp>
+      <p:sp>
+        <p:nvSpPr>
+          <p:cNvPr id="36" name="Text 33"/>
+          <p:cNvSpPr txBox="1"/>
+          <p:nvPr/>
+        </p:nvSpPr>
+        <p:spPr>
+          <a:xfrm>
+            <a:off x="1014984" y="5458968"/>
+            <a:ext cx="10134295" cy="256032"/>
+          </a:xfrm>
+          <a:prstGeom prst="rect">
+            <a:avLst/>
+          </a:prstGeom>
+          <a:noFill/>
+          <a:ln/>
+        </p:spPr>
+        <p:txBody>
+          <a:bodyPr wrap="square" lIns="0" tIns="0" rIns="0" bIns="0" rtlCol="0" anchor="t"/>
+          <a:lstStyle/>
+          <a:p>
+            <a:pPr indent="0" marL="0">
+              <a:buNone/>
+            </a:pPr>
+            <a:r>
+              <a:rPr lang="en-US" sz="1300" dirty="0">
                 <a:solidFill>
                   <a:srgbClr val="2B2D30"/>
                 </a:solidFill>
@@ -7927,22 +8224,22 @@
                 <a:ea typeface="Montserrat SemiBold" pitchFamily="34" charset="-122"/>
                 <a:cs typeface="Montserrat SemiBold" pitchFamily="34" charset="-120"/>
               </a:rPr>
-              <a:t>2 could not be proven either way</a:t>
-            </a:r>
-            <a:endParaRPr lang="en-US" sz="1350" dirty="0"/>
-          </a:p>
-        </p:txBody>
-      </p:sp>
-      <p:sp>
-        <p:nvSpPr>
-          <p:cNvPr id="28" name="Text 25"/>
-          <p:cNvSpPr txBox="1"/>
-          <p:nvPr/>
-        </p:nvSpPr>
-        <p:spPr>
-          <a:xfrm>
-            <a:off x="6528816" y="4517136"/>
-            <a:ext cx="4590288" cy="676656"/>
+              <a:t>An ordinary scanner hands the team 28 findings to triage. This run handed them one upgrade.</a:t>
+            </a:r>
+            <a:endParaRPr lang="en-US" sz="1300" dirty="0"/>
+          </a:p>
+        </p:txBody>
+      </p:sp>
+      <p:sp>
+        <p:nvSpPr>
+          <p:cNvPr id="37" name="Text 34"/>
+          <p:cNvSpPr txBox="1"/>
+          <p:nvPr/>
+        </p:nvSpPr>
+        <p:spPr>
+          <a:xfrm>
+            <a:off x="1014984" y="5742432"/>
+            <a:ext cx="10134295" cy="365760"/>
           </a:xfrm>
           <a:prstGeom prst="rect">
             <a:avLst/>
@@ -7956,199 +8253,22 @@
           <a:p>
             <a:pPr indent="0" marL="0">
               <a:lnSpc>
-                <a:spcPct val="122000"/>
+                <a:spcPct val="118000"/>
               </a:lnSpc>
               <a:buNone/>
             </a:pPr>
             <a:r>
-              <a:rPr lang="en-US" sz="1100" dirty="0">
-                <a:solidFill>
-                  <a:srgbClr val="6E7175"/>
+              <a:rPr lang="en-US" sz="950" dirty="0">
+                <a:solidFill>
+                  <a:srgbClr val="43464A"/>
                 </a:solidFill>
                 <a:latin typeface="Montserrat" pitchFamily="34" charset="0"/>
                 <a:ea typeface="Montserrat" pitchFamily="34" charset="-122"/>
                 <a:cs typeface="Montserrat" pitchFamily="34" charset="-120"/>
               </a:rPr>
-              <a:t>Both actively used by the app. AEGIS reported them as unproven rather than safe — the exact behaviour it exists to have.</a:t>
-            </a:r>
-            <a:endParaRPr lang="en-US" sz="1100" dirty="0"/>
-          </a:p>
-        </p:txBody>
-      </p:sp>
-      <p:sp>
-        <p:nvSpPr>
-          <p:cNvPr id="29" name="Shape 26"/>
-          <p:cNvSpPr/>
-          <p:nvPr/>
-        </p:nvSpPr>
-        <p:spPr>
-          <a:xfrm>
-            <a:off x="795528" y="5568696"/>
-            <a:ext cx="73152" cy="73152"/>
-          </a:xfrm>
-          <a:prstGeom prst="ellipse">
-            <a:avLst/>
-          </a:prstGeom>
-          <a:solidFill>
-            <a:srgbClr val="942838"/>
-          </a:solidFill>
-          <a:ln/>
-        </p:spPr>
-      </p:sp>
-      <p:sp>
-        <p:nvSpPr>
-          <p:cNvPr id="30" name="Text 27"/>
-          <p:cNvSpPr txBox="1"/>
-          <p:nvPr/>
-        </p:nvSpPr>
-        <p:spPr>
-          <a:xfrm>
-            <a:off x="996696" y="5504688"/>
-            <a:ext cx="10417759" cy="219456"/>
-          </a:xfrm>
-          <a:prstGeom prst="rect">
-            <a:avLst/>
-          </a:prstGeom>
-          <a:noFill/>
-          <a:ln/>
-        </p:spPr>
-        <p:txBody>
-          <a:bodyPr wrap="square" lIns="0" tIns="0" rIns="0" bIns="0" rtlCol="0" anchor="t"/>
-          <a:lstStyle/>
-          <a:p>
-            <a:pPr indent="0" marL="0">
-              <a:buNone/>
-            </a:pPr>
-            <a:r>
-              <a:rPr lang="en-US" sz="1050" dirty="0">
-                <a:solidFill>
-                  <a:srgbClr val="6E7175"/>
-                </a:solidFill>
-                <a:latin typeface="Montserrat" pitchFamily="34" charset="0"/>
-                <a:ea typeface="Montserrat" pitchFamily="34" charset="-122"/>
-                <a:cs typeface="Montserrat" pitchFamily="34" charset="-120"/>
-              </a:rPr>
-              <a:t>None of the 28 are on the US government's actively-exploited list.</a:t>
-            </a:r>
-            <a:endParaRPr lang="en-US" sz="1050" dirty="0"/>
-          </a:p>
-        </p:txBody>
-      </p:sp>
-      <p:sp>
-        <p:nvSpPr>
-          <p:cNvPr id="31" name="Shape 28"/>
-          <p:cNvSpPr/>
-          <p:nvPr/>
-        </p:nvSpPr>
-        <p:spPr>
-          <a:xfrm>
-            <a:off x="795528" y="5797296"/>
-            <a:ext cx="73152" cy="73152"/>
-          </a:xfrm>
-          <a:prstGeom prst="ellipse">
-            <a:avLst/>
-          </a:prstGeom>
-          <a:solidFill>
-            <a:srgbClr val="942838"/>
-          </a:solidFill>
-          <a:ln/>
-        </p:spPr>
-      </p:sp>
-      <p:sp>
-        <p:nvSpPr>
-          <p:cNvPr id="32" name="Text 29"/>
-          <p:cNvSpPr txBox="1"/>
-          <p:nvPr/>
-        </p:nvSpPr>
-        <p:spPr>
-          <a:xfrm>
-            <a:off x="996696" y="5733288"/>
-            <a:ext cx="10417759" cy="219456"/>
-          </a:xfrm>
-          <a:prstGeom prst="rect">
-            <a:avLst/>
-          </a:prstGeom>
-          <a:noFill/>
-          <a:ln/>
-        </p:spPr>
-        <p:txBody>
-          <a:bodyPr wrap="square" lIns="0" tIns="0" rIns="0" bIns="0" rtlCol="0" anchor="t"/>
-          <a:lstStyle/>
-          <a:p>
-            <a:pPr indent="0" marL="0">
-              <a:buNone/>
-            </a:pPr>
-            <a:r>
-              <a:rPr lang="en-US" sz="1050" dirty="0">
-                <a:solidFill>
-                  <a:srgbClr val="6E7175"/>
-                </a:solidFill>
-                <a:latin typeface="Montserrat" pitchFamily="34" charset="0"/>
-                <a:ea typeface="Montserrat" pitchFamily="34" charset="-122"/>
-                <a:cs typeface="Montserrat" pitchFamily="34" charset="-120"/>
-              </a:rPr>
-              <a:t>All three needing a decision have a non-breaking upgrade available, and the repo's own tests can verify it.</a:t>
-            </a:r>
-            <a:endParaRPr lang="en-US" sz="1050" dirty="0"/>
-          </a:p>
-        </p:txBody>
-      </p:sp>
-      <p:sp>
-        <p:nvSpPr>
-          <p:cNvPr id="33" name="Shape 30"/>
-          <p:cNvSpPr/>
-          <p:nvPr/>
-        </p:nvSpPr>
-        <p:spPr>
-          <a:xfrm>
-            <a:off x="795528" y="6025896"/>
-            <a:ext cx="73152" cy="73152"/>
-          </a:xfrm>
-          <a:prstGeom prst="ellipse">
-            <a:avLst/>
-          </a:prstGeom>
-          <a:solidFill>
-            <a:srgbClr val="942838"/>
-          </a:solidFill>
-          <a:ln/>
-        </p:spPr>
-      </p:sp>
-      <p:sp>
-        <p:nvSpPr>
-          <p:cNvPr id="34" name="Text 31"/>
-          <p:cNvSpPr txBox="1"/>
-          <p:nvPr/>
-        </p:nvSpPr>
-        <p:spPr>
-          <a:xfrm>
-            <a:off x="996696" y="5961888"/>
-            <a:ext cx="10417759" cy="219456"/>
-          </a:xfrm>
-          <a:prstGeom prst="rect">
-            <a:avLst/>
-          </a:prstGeom>
-          <a:noFill/>
-          <a:ln/>
-        </p:spPr>
-        <p:txBody>
-          <a:bodyPr wrap="square" lIns="0" tIns="0" rIns="0" bIns="0" rtlCol="0" anchor="t"/>
-          <a:lstStyle/>
-          <a:p>
-            <a:pPr indent="0" marL="0">
-              <a:buNone/>
-            </a:pPr>
-            <a:r>
-              <a:rPr lang="en-US" sz="1050" dirty="0">
-                <a:solidFill>
-                  <a:srgbClr val="6E7175"/>
-                </a:solidFill>
-                <a:latin typeface="Montserrat" pitchFamily="34" charset="0"/>
-                <a:ea typeface="Montserrat" pitchFamily="34" charset="-122"/>
-                <a:cs typeface="Montserrat" pitchFamily="34" charset="-120"/>
-              </a:rPr>
-              <a:t>The scan was read-only. Nothing in the repository was changed.</a:t>
-            </a:r>
-            <a:endParaRPr lang="en-US" sz="1050" dirty="0"/>
+              <a:t>Two of the three could not be ruled out, and AEGIS kept them on the list rather than calling them safe — but the same upgrade covers them, so the caution costs nothing. None of the 28 appear on the US government's actively-exploited list.</a:t>
+            </a:r>
+            <a:endParaRPr lang="en-US" sz="950" dirty="0"/>
           </a:p>
         </p:txBody>
       </p:sp>
@@ -8472,183 +8592,6 @@
             <a:prstDash val="solid"/>
           </a:ln>
           <a:effectLst>
-            <a:outerShdw sx="100000" sy="100000" kx="0" ky="0" algn="bl" rotWithShape="0" blurRad="3.1302311439840524e+54" dist="7.825577859960131e+53" dir="1.1754624614400003e+64">
-              <a:srgbClr val="959092">
-                <a:alpha val="2.2e+64"/>
-              </a:srgbClr>
-            </a:outerShdw>
-          </a:effectLst>
-        </p:spPr>
-      </p:sp>
-      <p:sp>
-        <p:nvSpPr>
-          <p:cNvPr id="11" name="Shape 8"/>
-          <p:cNvSpPr/>
-          <p:nvPr/>
-        </p:nvSpPr>
-        <p:spPr>
-          <a:xfrm>
-            <a:off x="777240" y="2523744"/>
-            <a:ext cx="3356762" cy="45720"/>
-          </a:xfrm>
-          <a:prstGeom prst="rect">
-            <a:avLst/>
-          </a:prstGeom>
-          <a:solidFill>
-            <a:srgbClr val="942838"/>
-          </a:solidFill>
-          <a:ln/>
-        </p:spPr>
-      </p:sp>
-      <p:sp>
-        <p:nvSpPr>
-          <p:cNvPr id="12" name="Text 9"/>
-          <p:cNvSpPr txBox="1"/>
-          <p:nvPr/>
-        </p:nvSpPr>
-        <p:spPr>
-          <a:xfrm>
-            <a:off x="1088136" y="2798064"/>
-            <a:ext cx="914400" cy="310896"/>
-          </a:xfrm>
-          <a:prstGeom prst="rect">
-            <a:avLst/>
-          </a:prstGeom>
-          <a:noFill/>
-          <a:ln/>
-        </p:spPr>
-        <p:txBody>
-          <a:bodyPr wrap="square" lIns="0" tIns="0" rIns="0" bIns="0" rtlCol="0" anchor="t"/>
-          <a:lstStyle/>
-          <a:p>
-            <a:pPr indent="0" marL="0">
-              <a:buNone/>
-            </a:pPr>
-            <a:r>
-              <a:rPr lang="en-US" sz="2000" spc="-30" kern="0" dirty="0">
-                <a:solidFill>
-                  <a:srgbClr val="DFBEC4"/>
-                </a:solidFill>
-                <a:latin typeface="Montserrat ExtraBold" pitchFamily="34" charset="0"/>
-                <a:ea typeface="Montserrat ExtraBold" pitchFamily="34" charset="-122"/>
-                <a:cs typeface="Montserrat ExtraBold" pitchFamily="34" charset="-120"/>
-              </a:rPr>
-              <a:t>01</a:t>
-            </a:r>
-            <a:endParaRPr lang="en-US" sz="2000" dirty="0"/>
-          </a:p>
-        </p:txBody>
-      </p:sp>
-      <p:sp>
-        <p:nvSpPr>
-          <p:cNvPr id="13" name="Text 10"/>
-          <p:cNvSpPr txBox="1"/>
-          <p:nvPr/>
-        </p:nvSpPr>
-        <p:spPr>
-          <a:xfrm>
-            <a:off x="1088136" y="3182112"/>
-            <a:ext cx="2734970" cy="566928"/>
-          </a:xfrm>
-          <a:prstGeom prst="rect">
-            <a:avLst/>
-          </a:prstGeom>
-          <a:noFill/>
-          <a:ln/>
-        </p:spPr>
-        <p:txBody>
-          <a:bodyPr wrap="square" lIns="0" tIns="0" rIns="0" bIns="0" rtlCol="0" anchor="t"/>
-          <a:lstStyle/>
-          <a:p>
-            <a:pPr indent="0" marL="0">
-              <a:lnSpc>
-                <a:spcPct val="108000"/>
-              </a:lnSpc>
-              <a:buNone/>
-            </a:pPr>
-            <a:r>
-              <a:rPr lang="en-US" sz="1450" dirty="0">
-                <a:solidFill>
-                  <a:srgbClr val="2B2D30"/>
-                </a:solidFill>
-                <a:latin typeface="Montserrat SemiBold" pitchFamily="34" charset="0"/>
-                <a:ea typeface="Montserrat SemiBold" pitchFamily="34" charset="-122"/>
-                <a:cs typeface="Montserrat SemiBold" pitchFamily="34" charset="-120"/>
-              </a:rPr>
-              <a:t>Teach it the framework packages</a:t>
-            </a:r>
-            <a:endParaRPr lang="en-US" sz="1450" dirty="0"/>
-          </a:p>
-        </p:txBody>
-      </p:sp>
-      <p:sp>
-        <p:nvSpPr>
-          <p:cNvPr id="14" name="Text 11"/>
-          <p:cNvSpPr txBox="1"/>
-          <p:nvPr/>
-        </p:nvSpPr>
-        <p:spPr>
-          <a:xfrm>
-            <a:off x="1088136" y="3822192"/>
-            <a:ext cx="2734970" cy="1737360"/>
-          </a:xfrm>
-          <a:prstGeom prst="rect">
-            <a:avLst/>
-          </a:prstGeom>
-          <a:noFill/>
-          <a:ln/>
-        </p:spPr>
-        <p:txBody>
-          <a:bodyPr wrap="square" lIns="0" tIns="0" rIns="0" bIns="0" rtlCol="0" anchor="t"/>
-          <a:lstStyle/>
-          <a:p>
-            <a:pPr indent="0" marL="0">
-              <a:lnSpc>
-                <a:spcPct val="126000"/>
-              </a:lnSpc>
-              <a:buNone/>
-            </a:pPr>
-            <a:r>
-              <a:rPr lang="en-US" sz="1100" dirty="0">
-                <a:solidFill>
-                  <a:srgbClr val="6E7175"/>
-                </a:solidFill>
-                <a:latin typeface="Montserrat" pitchFamily="34" charset="0"/>
-                <a:ea typeface="Montserrat" pitchFamily="34" charset="-122"/>
-                <a:cs typeface="Montserrat" pitchFamily="34" charset="-120"/>
-              </a:rPr>
-              <a:t>AEGIS knows exactly which function is the dangerous one for about nine packages. Angular is not among them yet — which is why two findings came back "can't prove" instead of a straight answer. Extending that list turns those into a verdict.</a:t>
-            </a:r>
-            <a:endParaRPr lang="en-US" sz="1100" dirty="0"/>
-          </a:p>
-        </p:txBody>
-      </p:sp>
-      <p:sp>
-        <p:nvSpPr>
-          <p:cNvPr id="15" name="Shape 12"/>
-          <p:cNvSpPr/>
-          <p:nvPr/>
-        </p:nvSpPr>
-        <p:spPr>
-          <a:xfrm>
-            <a:off x="4417466" y="2523744"/>
-            <a:ext cx="3356762" cy="3145536"/>
-          </a:xfrm>
-          <a:prstGeom prst="roundRect">
-            <a:avLst>
-              <a:gd name="adj" fmla="val 1744"/>
-            </a:avLst>
-          </a:prstGeom>
-          <a:solidFill>
-            <a:srgbClr val="FFFFFF"/>
-          </a:solidFill>
-          <a:ln w="9525">
-            <a:solidFill>
-              <a:srgbClr val="E6E4E2"/>
-            </a:solidFill>
-            <a:prstDash val="solid"/>
-          </a:ln>
-          <a:effectLst>
             <a:outerShdw sx="100000" sy="100000" kx="0" ky="0" algn="bl" rotWithShape="0" blurRad="3.9753935528597466e+58" dist="9.938483882149366e+57" dir="7.052774768640002e+68">
               <a:srgbClr val="959092">
                 <a:alpha val="2.2e+69"/>
@@ -8659,13 +8602,13 @@
       </p:sp>
       <p:sp>
         <p:nvSpPr>
-          <p:cNvPr id="16" name="Shape 13"/>
+          <p:cNvPr id="11" name="Shape 8"/>
           <p:cNvSpPr/>
           <p:nvPr/>
         </p:nvSpPr>
         <p:spPr>
           <a:xfrm>
-            <a:off x="4417466" y="2523744"/>
+            <a:off x="777240" y="2523744"/>
             <a:ext cx="3356762" cy="45720"/>
           </a:xfrm>
           <a:prstGeom prst="rect">
@@ -8679,13 +8622,13 @@
       </p:sp>
       <p:sp>
         <p:nvSpPr>
-          <p:cNvPr id="17" name="Text 14"/>
-          <p:cNvSpPr txBox="1"/>
-          <p:nvPr/>
-        </p:nvSpPr>
-        <p:spPr>
-          <a:xfrm>
-            <a:off x="4728362" y="2798064"/>
+          <p:cNvPr id="12" name="Text 9"/>
+          <p:cNvSpPr txBox="1"/>
+          <p:nvPr/>
+        </p:nvSpPr>
+        <p:spPr>
+          <a:xfrm>
+            <a:off x="1088136" y="2798064"/>
             <a:ext cx="914400" cy="310896"/>
           </a:xfrm>
           <a:prstGeom prst="rect">
@@ -8710,7 +8653,7 @@
                 <a:ea typeface="Montserrat ExtraBold" pitchFamily="34" charset="-122"/>
                 <a:cs typeface="Montserrat ExtraBold" pitchFamily="34" charset="-120"/>
               </a:rPr>
-              <a:t>02</a:t>
+              <a:t>01</a:t>
             </a:r>
             <a:endParaRPr lang="en-US" sz="2000" dirty="0"/>
           </a:p>
@@ -8718,13 +8661,13 @@
       </p:sp>
       <p:sp>
         <p:nvSpPr>
-          <p:cNvPr id="18" name="Text 15"/>
-          <p:cNvSpPr txBox="1"/>
-          <p:nvPr/>
-        </p:nvSpPr>
-        <p:spPr>
-          <a:xfrm>
-            <a:off x="4728362" y="3182112"/>
+          <p:cNvPr id="13" name="Text 10"/>
+          <p:cNvSpPr txBox="1"/>
+          <p:nvPr/>
+        </p:nvSpPr>
+        <p:spPr>
+          <a:xfrm>
+            <a:off x="1088136" y="3182112"/>
             <a:ext cx="2734970" cy="566928"/>
           </a:xfrm>
           <a:prstGeom prst="rect">
@@ -8752,7 +8695,7 @@
                 <a:ea typeface="Montserrat SemiBold" pitchFamily="34" charset="-122"/>
                 <a:cs typeface="Montserrat SemiBold" pitchFamily="34" charset="-120"/>
               </a:rPr>
-              <a:t>Keep the live lookups working everywhere</a:t>
+              <a:t>Teach it the framework packages</a:t>
             </a:r>
             <a:endParaRPr lang="en-US" sz="1450" dirty="0"/>
           </a:p>
@@ -8760,13 +8703,13 @@
       </p:sp>
       <p:sp>
         <p:nvSpPr>
-          <p:cNvPr id="19" name="Text 16"/>
-          <p:cNvSpPr txBox="1"/>
-          <p:nvPr/>
-        </p:nvSpPr>
-        <p:spPr>
-          <a:xfrm>
-            <a:off x="4728362" y="3822192"/>
+          <p:cNvPr id="14" name="Text 11"/>
+          <p:cNvSpPr txBox="1"/>
+          <p:nvPr/>
+        </p:nvSpPr>
+        <p:spPr>
+          <a:xfrm>
+            <a:off x="1088136" y="3822192"/>
             <a:ext cx="2734970" cy="1737360"/>
           </a:xfrm>
           <a:prstGeom prst="rect">
@@ -8794,7 +8737,7 @@
                 <a:ea typeface="Montserrat" pitchFamily="34" charset="-122"/>
                 <a:cs typeface="Montserrat" pitchFamily="34" charset="-120"/>
               </a:rPr>
-              <a:t>This run pulled real flaw data live. On networks where the security proxy inspects traffic it still fails, so the split-scan workaround stays until an inspection bypass is in place.</a:t>
+              <a:t>AEGIS knows exactly which function is the dangerous one for about nine packages. Angular is not among them yet — which is why two findings came back "can't prove" instead of a straight answer. Extending that list turns those into a verdict.</a:t>
             </a:r>
             <a:endParaRPr lang="en-US" sz="1100" dirty="0"/>
           </a:p>
@@ -8802,13 +8745,13 @@
       </p:sp>
       <p:sp>
         <p:nvSpPr>
-          <p:cNvPr id="20" name="Shape 17"/>
+          <p:cNvPr id="15" name="Shape 12"/>
           <p:cNvSpPr/>
           <p:nvPr/>
         </p:nvSpPr>
         <p:spPr>
           <a:xfrm>
-            <a:off x="8057693" y="2523744"/>
+            <a:off x="4417466" y="2523744"/>
             <a:ext cx="3356762" cy="3145536"/>
           </a:xfrm>
           <a:prstGeom prst="roundRect">
@@ -8829,6 +8772,183 @@
             <a:outerShdw sx="100000" sy="100000" kx="0" ky="0" algn="bl" rotWithShape="0" blurRad="5.048749812131878e+62" dist="1.2621874530329695e+62" dir="4.2316648611840007e+73">
               <a:srgbClr val="959092">
                 <a:alpha val="2.2e+74"/>
+              </a:srgbClr>
+            </a:outerShdw>
+          </a:effectLst>
+        </p:spPr>
+      </p:sp>
+      <p:sp>
+        <p:nvSpPr>
+          <p:cNvPr id="16" name="Shape 13"/>
+          <p:cNvSpPr/>
+          <p:nvPr/>
+        </p:nvSpPr>
+        <p:spPr>
+          <a:xfrm>
+            <a:off x="4417466" y="2523744"/>
+            <a:ext cx="3356762" cy="45720"/>
+          </a:xfrm>
+          <a:prstGeom prst="rect">
+            <a:avLst/>
+          </a:prstGeom>
+          <a:solidFill>
+            <a:srgbClr val="942838"/>
+          </a:solidFill>
+          <a:ln/>
+        </p:spPr>
+      </p:sp>
+      <p:sp>
+        <p:nvSpPr>
+          <p:cNvPr id="17" name="Text 14"/>
+          <p:cNvSpPr txBox="1"/>
+          <p:nvPr/>
+        </p:nvSpPr>
+        <p:spPr>
+          <a:xfrm>
+            <a:off x="4728362" y="2798064"/>
+            <a:ext cx="914400" cy="310896"/>
+          </a:xfrm>
+          <a:prstGeom prst="rect">
+            <a:avLst/>
+          </a:prstGeom>
+          <a:noFill/>
+          <a:ln/>
+        </p:spPr>
+        <p:txBody>
+          <a:bodyPr wrap="square" lIns="0" tIns="0" rIns="0" bIns="0" rtlCol="0" anchor="t"/>
+          <a:lstStyle/>
+          <a:p>
+            <a:pPr indent="0" marL="0">
+              <a:buNone/>
+            </a:pPr>
+            <a:r>
+              <a:rPr lang="en-US" sz="2000" spc="-30" kern="0" dirty="0">
+                <a:solidFill>
+                  <a:srgbClr val="DFBEC4"/>
+                </a:solidFill>
+                <a:latin typeface="Montserrat ExtraBold" pitchFamily="34" charset="0"/>
+                <a:ea typeface="Montserrat ExtraBold" pitchFamily="34" charset="-122"/>
+                <a:cs typeface="Montserrat ExtraBold" pitchFamily="34" charset="-120"/>
+              </a:rPr>
+              <a:t>02</a:t>
+            </a:r>
+            <a:endParaRPr lang="en-US" sz="2000" dirty="0"/>
+          </a:p>
+        </p:txBody>
+      </p:sp>
+      <p:sp>
+        <p:nvSpPr>
+          <p:cNvPr id="18" name="Text 15"/>
+          <p:cNvSpPr txBox="1"/>
+          <p:nvPr/>
+        </p:nvSpPr>
+        <p:spPr>
+          <a:xfrm>
+            <a:off x="4728362" y="3182112"/>
+            <a:ext cx="2734970" cy="566928"/>
+          </a:xfrm>
+          <a:prstGeom prst="rect">
+            <a:avLst/>
+          </a:prstGeom>
+          <a:noFill/>
+          <a:ln/>
+        </p:spPr>
+        <p:txBody>
+          <a:bodyPr wrap="square" lIns="0" tIns="0" rIns="0" bIns="0" rtlCol="0" anchor="t"/>
+          <a:lstStyle/>
+          <a:p>
+            <a:pPr indent="0" marL="0">
+              <a:lnSpc>
+                <a:spcPct val="108000"/>
+              </a:lnSpc>
+              <a:buNone/>
+            </a:pPr>
+            <a:r>
+              <a:rPr lang="en-US" sz="1450" dirty="0">
+                <a:solidFill>
+                  <a:srgbClr val="2B2D30"/>
+                </a:solidFill>
+                <a:latin typeface="Montserrat SemiBold" pitchFamily="34" charset="0"/>
+                <a:ea typeface="Montserrat SemiBold" pitchFamily="34" charset="-122"/>
+                <a:cs typeface="Montserrat SemiBold" pitchFamily="34" charset="-120"/>
+              </a:rPr>
+              <a:t>Keep the live lookups working everywhere</a:t>
+            </a:r>
+            <a:endParaRPr lang="en-US" sz="1450" dirty="0"/>
+          </a:p>
+        </p:txBody>
+      </p:sp>
+      <p:sp>
+        <p:nvSpPr>
+          <p:cNvPr id="19" name="Text 16"/>
+          <p:cNvSpPr txBox="1"/>
+          <p:nvPr/>
+        </p:nvSpPr>
+        <p:spPr>
+          <a:xfrm>
+            <a:off x="4728362" y="3822192"/>
+            <a:ext cx="2734970" cy="1737360"/>
+          </a:xfrm>
+          <a:prstGeom prst="rect">
+            <a:avLst/>
+          </a:prstGeom>
+          <a:noFill/>
+          <a:ln/>
+        </p:spPr>
+        <p:txBody>
+          <a:bodyPr wrap="square" lIns="0" tIns="0" rIns="0" bIns="0" rtlCol="0" anchor="t"/>
+          <a:lstStyle/>
+          <a:p>
+            <a:pPr indent="0" marL="0">
+              <a:lnSpc>
+                <a:spcPct val="126000"/>
+              </a:lnSpc>
+              <a:buNone/>
+            </a:pPr>
+            <a:r>
+              <a:rPr lang="en-US" sz="1100" dirty="0">
+                <a:solidFill>
+                  <a:srgbClr val="6E7175"/>
+                </a:solidFill>
+                <a:latin typeface="Montserrat" pitchFamily="34" charset="0"/>
+                <a:ea typeface="Montserrat" pitchFamily="34" charset="-122"/>
+                <a:cs typeface="Montserrat" pitchFamily="34" charset="-120"/>
+              </a:rPr>
+              <a:t>This run pulled real flaw data live. On networks where the security proxy inspects traffic it still fails, so the split-scan workaround stays until an inspection bypass is in place.</a:t>
+            </a:r>
+            <a:endParaRPr lang="en-US" sz="1100" dirty="0"/>
+          </a:p>
+        </p:txBody>
+      </p:sp>
+      <p:sp>
+        <p:nvSpPr>
+          <p:cNvPr id="20" name="Shape 17"/>
+          <p:cNvSpPr/>
+          <p:nvPr/>
+        </p:nvSpPr>
+        <p:spPr>
+          <a:xfrm>
+            <a:off x="8057693" y="2523744"/>
+            <a:ext cx="3356762" cy="3145536"/>
+          </a:xfrm>
+          <a:prstGeom prst="roundRect">
+            <a:avLst>
+              <a:gd name="adj" fmla="val 1744"/>
+            </a:avLst>
+          </a:prstGeom>
+          <a:solidFill>
+            <a:srgbClr val="FFFFFF"/>
+          </a:solidFill>
+          <a:ln w="9525">
+            <a:solidFill>
+              <a:srgbClr val="E6E4E2"/>
+            </a:solidFill>
+            <a:prstDash val="solid"/>
+          </a:ln>
+          <a:effectLst>
+            <a:outerShdw sx="100000" sy="100000" kx="0" ky="0" algn="bl" rotWithShape="0" blurRad="6.411912261407485e+66" dist="1.6029780653518713e+66" dir="2.5389989167104004e+78">
+              <a:srgbClr val="959092">
+                <a:alpha val="2.2000000000000002e+79"/>
               </a:srgbClr>
             </a:outerShdw>
           </a:effectLst>
@@ -16128,7 +16248,7 @@
                 <a:ea typeface="Montserrat SemiBold" pitchFamily="34" charset="-122"/>
                 <a:cs typeface="Montserrat SemiBold" pitchFamily="34" charset="-120"/>
               </a:rPr>
-              <a:t>AEGIS built, its safety rails tested, and run for real: 1,518 packages in a Stewart repository down to 3 needing a decision.</a:t>
+              <a:t>AEGIS built, its safety rails tested, and run for real: 1,518 packages in a Stewart repository down to a single upgrade.</a:t>
             </a:r>
             <a:endParaRPr lang="en-US" sz="1150" dirty="0"/>
           </a:p>
